--- a/public/videos/repositories/retro-game-watch/retro-game-watch-tech-preview.pptx
+++ b/public/videos/repositories/retro-game-watch/retro-game-watch-tech-preview.pptx
@@ -134,7 +134,7 @@
           <p:cNvPr id="2" name="タイトル 1">
             <a:extLst>
               <a:ext uri="{FF2B5EF4-FFF2-40B4-BE49-F238E27FC236}">
-                <a16:creationId xmlns:a16="http://schemas.microsoft.com/office/drawing/2014/main" id="{90573F8A-9021-8218-BBFF-4E5948AEAAAB}"/>
+                <a16:creationId xmlns:a16="http://schemas.microsoft.com/office/drawing/2014/main" id="{B6461D8B-FC54-9DA6-D68B-73838C8BCF03}"/>
               </a:ext>
             </a:extLst>
           </p:cNvPr>
@@ -171,7 +171,7 @@
           <p:cNvPr id="3" name="字幕 2">
             <a:extLst>
               <a:ext uri="{FF2B5EF4-FFF2-40B4-BE49-F238E27FC236}">
-                <a16:creationId xmlns:a16="http://schemas.microsoft.com/office/drawing/2014/main" id="{B7D83302-937F-3CE8-BE79-003C6E8BBFD3}"/>
+                <a16:creationId xmlns:a16="http://schemas.microsoft.com/office/drawing/2014/main" id="{C6A1E20D-113F-CC1E-9D3B-51F1F77118F4}"/>
               </a:ext>
             </a:extLst>
           </p:cNvPr>
@@ -241,7 +241,7 @@
           <p:cNvPr id="4" name="日付プレースホルダー 3">
             <a:extLst>
               <a:ext uri="{FF2B5EF4-FFF2-40B4-BE49-F238E27FC236}">
-                <a16:creationId xmlns:a16="http://schemas.microsoft.com/office/drawing/2014/main" id="{1C8A950F-6D28-1825-3CCD-9B2FC465986B}"/>
+                <a16:creationId xmlns:a16="http://schemas.microsoft.com/office/drawing/2014/main" id="{1A9966BF-59A7-43FC-4DF6-7AD75108A06B}"/>
               </a:ext>
             </a:extLst>
           </p:cNvPr>
@@ -257,7 +257,7 @@
           <a:bodyPr/>
           <a:lstStyle/>
           <a:p>
-            <a:fld id="{0A8A0AA6-8141-4780-979E-310A883CB877}" type="datetimeFigureOut">
+            <a:fld id="{D8CE3B7E-E1F2-4F78-8443-C780D5803C9B}" type="datetimeFigureOut">
               <a:rPr kumimoji="1" lang="ja-JP" altLang="en-US" smtClean="0"/>
               <a:t>2026/7/30</a:t>
             </a:fld>
@@ -270,7 +270,7 @@
           <p:cNvPr id="5" name="フッター プレースホルダー 4">
             <a:extLst>
               <a:ext uri="{FF2B5EF4-FFF2-40B4-BE49-F238E27FC236}">
-                <a16:creationId xmlns:a16="http://schemas.microsoft.com/office/drawing/2014/main" id="{8273464F-913C-74B2-0A46-A7742173C067}"/>
+                <a16:creationId xmlns:a16="http://schemas.microsoft.com/office/drawing/2014/main" id="{DCF2656C-CA0F-2D35-3C2F-3A61CD268E16}"/>
               </a:ext>
             </a:extLst>
           </p:cNvPr>
@@ -295,7 +295,7 @@
           <p:cNvPr id="6" name="スライド番号プレースホルダー 5">
             <a:extLst>
               <a:ext uri="{FF2B5EF4-FFF2-40B4-BE49-F238E27FC236}">
-                <a16:creationId xmlns:a16="http://schemas.microsoft.com/office/drawing/2014/main" id="{EE10D04A-9686-B029-BF16-31DBDBCA0BC2}"/>
+                <a16:creationId xmlns:a16="http://schemas.microsoft.com/office/drawing/2014/main" id="{25980869-5E77-B47E-745D-8B9AACDE31A3}"/>
               </a:ext>
             </a:extLst>
           </p:cNvPr>
@@ -311,7 +311,7 @@
           <a:bodyPr/>
           <a:lstStyle/>
           <a:p>
-            <a:fld id="{6264FF53-8EA5-4F5B-BDBD-16DA39B13EAE}" type="slidenum">
+            <a:fld id="{F0682D63-0293-4361-B49C-680D0399EA59}" type="slidenum">
               <a:rPr kumimoji="1" lang="ja-JP" altLang="en-US" smtClean="0"/>
               <a:t>‹#›</a:t>
             </a:fld>
@@ -322,7 +322,7 @@
     </p:spTree>
     <p:extLst>
       <p:ext uri="{BB962C8B-B14F-4D97-AF65-F5344CB8AC3E}">
-        <p14:creationId xmlns:p14="http://schemas.microsoft.com/office/powerpoint/2010/main" val="1035878443"/>
+        <p14:creationId xmlns:p14="http://schemas.microsoft.com/office/powerpoint/2010/main" val="652250856"/>
       </p:ext>
     </p:extLst>
   </p:cSld>
@@ -354,7 +354,7 @@
           <p:cNvPr id="2" name="タイトル 1">
             <a:extLst>
               <a:ext uri="{FF2B5EF4-FFF2-40B4-BE49-F238E27FC236}">
-                <a16:creationId xmlns:a16="http://schemas.microsoft.com/office/drawing/2014/main" id="{5F2C3C73-2B3A-CFF8-D362-C97DFB5771A0}"/>
+                <a16:creationId xmlns:a16="http://schemas.microsoft.com/office/drawing/2014/main" id="{2486EBAB-6C27-1BEA-16FC-A01F3C29BD4D}"/>
               </a:ext>
             </a:extLst>
           </p:cNvPr>
@@ -382,7 +382,7 @@
           <p:cNvPr id="3" name="縦書きテキスト プレースホルダー 2">
             <a:extLst>
               <a:ext uri="{FF2B5EF4-FFF2-40B4-BE49-F238E27FC236}">
-                <a16:creationId xmlns:a16="http://schemas.microsoft.com/office/drawing/2014/main" id="{A5822139-98D1-5A48-BBEA-30ED857ACD73}"/>
+                <a16:creationId xmlns:a16="http://schemas.microsoft.com/office/drawing/2014/main" id="{C3527927-ABD7-9626-8140-9E81DDCF55C4}"/>
               </a:ext>
             </a:extLst>
           </p:cNvPr>
@@ -471,7 +471,7 @@
           <p:cNvPr id="4" name="日付プレースホルダー 3">
             <a:extLst>
               <a:ext uri="{FF2B5EF4-FFF2-40B4-BE49-F238E27FC236}">
-                <a16:creationId xmlns:a16="http://schemas.microsoft.com/office/drawing/2014/main" id="{D8EAD733-E22B-24E3-EF89-1D2BBD4C420B}"/>
+                <a16:creationId xmlns:a16="http://schemas.microsoft.com/office/drawing/2014/main" id="{97F4A5C2-F8BF-D1F1-0735-7D11907A4DCE}"/>
               </a:ext>
             </a:extLst>
           </p:cNvPr>
@@ -487,7 +487,7 @@
           <a:bodyPr/>
           <a:lstStyle/>
           <a:p>
-            <a:fld id="{0A8A0AA6-8141-4780-979E-310A883CB877}" type="datetimeFigureOut">
+            <a:fld id="{D8CE3B7E-E1F2-4F78-8443-C780D5803C9B}" type="datetimeFigureOut">
               <a:rPr kumimoji="1" lang="ja-JP" altLang="en-US" smtClean="0"/>
               <a:t>2026/7/30</a:t>
             </a:fld>
@@ -500,7 +500,7 @@
           <p:cNvPr id="5" name="フッター プレースホルダー 4">
             <a:extLst>
               <a:ext uri="{FF2B5EF4-FFF2-40B4-BE49-F238E27FC236}">
-                <a16:creationId xmlns:a16="http://schemas.microsoft.com/office/drawing/2014/main" id="{C6ACB9EA-CDC6-22B8-EF75-718A5286F822}"/>
+                <a16:creationId xmlns:a16="http://schemas.microsoft.com/office/drawing/2014/main" id="{C82DBD68-2152-E28C-3250-E48761339639}"/>
               </a:ext>
             </a:extLst>
           </p:cNvPr>
@@ -525,7 +525,7 @@
           <p:cNvPr id="6" name="スライド番号プレースホルダー 5">
             <a:extLst>
               <a:ext uri="{FF2B5EF4-FFF2-40B4-BE49-F238E27FC236}">
-                <a16:creationId xmlns:a16="http://schemas.microsoft.com/office/drawing/2014/main" id="{CAC6A60B-BA69-5FC1-0228-9780D3125519}"/>
+                <a16:creationId xmlns:a16="http://schemas.microsoft.com/office/drawing/2014/main" id="{51A0CF2F-EA1B-4588-743C-DF3CBAEE81C2}"/>
               </a:ext>
             </a:extLst>
           </p:cNvPr>
@@ -541,7 +541,7 @@
           <a:bodyPr/>
           <a:lstStyle/>
           <a:p>
-            <a:fld id="{6264FF53-8EA5-4F5B-BDBD-16DA39B13EAE}" type="slidenum">
+            <a:fld id="{F0682D63-0293-4361-B49C-680D0399EA59}" type="slidenum">
               <a:rPr kumimoji="1" lang="ja-JP" altLang="en-US" smtClean="0"/>
               <a:t>‹#›</a:t>
             </a:fld>
@@ -552,7 +552,7 @@
     </p:spTree>
     <p:extLst>
       <p:ext uri="{BB962C8B-B14F-4D97-AF65-F5344CB8AC3E}">
-        <p14:creationId xmlns:p14="http://schemas.microsoft.com/office/powerpoint/2010/main" val="907990598"/>
+        <p14:creationId xmlns:p14="http://schemas.microsoft.com/office/powerpoint/2010/main" val="612095331"/>
       </p:ext>
     </p:extLst>
   </p:cSld>
@@ -584,7 +584,7 @@
           <p:cNvPr id="2" name="縦書きタイトル 1">
             <a:extLst>
               <a:ext uri="{FF2B5EF4-FFF2-40B4-BE49-F238E27FC236}">
-                <a16:creationId xmlns:a16="http://schemas.microsoft.com/office/drawing/2014/main" id="{45BB8C15-7717-91CB-FC08-D51E3C6AABE2}"/>
+                <a16:creationId xmlns:a16="http://schemas.microsoft.com/office/drawing/2014/main" id="{4760A0F1-5AAF-5B6C-FDCD-5D7AA2A96582}"/>
               </a:ext>
             </a:extLst>
           </p:cNvPr>
@@ -617,7 +617,7 @@
           <p:cNvPr id="3" name="縦書きテキスト プレースホルダー 2">
             <a:extLst>
               <a:ext uri="{FF2B5EF4-FFF2-40B4-BE49-F238E27FC236}">
-                <a16:creationId xmlns:a16="http://schemas.microsoft.com/office/drawing/2014/main" id="{63FD9B6C-C643-575F-0112-734B4F55D557}"/>
+                <a16:creationId xmlns:a16="http://schemas.microsoft.com/office/drawing/2014/main" id="{A416294A-880F-B1B3-6434-09856DFE51B6}"/>
               </a:ext>
             </a:extLst>
           </p:cNvPr>
@@ -711,7 +711,7 @@
           <p:cNvPr id="4" name="日付プレースホルダー 3">
             <a:extLst>
               <a:ext uri="{FF2B5EF4-FFF2-40B4-BE49-F238E27FC236}">
-                <a16:creationId xmlns:a16="http://schemas.microsoft.com/office/drawing/2014/main" id="{D9F5F7BA-DF5D-CD32-689C-A86528EBB11E}"/>
+                <a16:creationId xmlns:a16="http://schemas.microsoft.com/office/drawing/2014/main" id="{9EC75604-DD85-B39E-A89A-9F2B741D8055}"/>
               </a:ext>
             </a:extLst>
           </p:cNvPr>
@@ -727,7 +727,7 @@
           <a:bodyPr/>
           <a:lstStyle/>
           <a:p>
-            <a:fld id="{0A8A0AA6-8141-4780-979E-310A883CB877}" type="datetimeFigureOut">
+            <a:fld id="{D8CE3B7E-E1F2-4F78-8443-C780D5803C9B}" type="datetimeFigureOut">
               <a:rPr kumimoji="1" lang="ja-JP" altLang="en-US" smtClean="0"/>
               <a:t>2026/7/30</a:t>
             </a:fld>
@@ -740,7 +740,7 @@
           <p:cNvPr id="5" name="フッター プレースホルダー 4">
             <a:extLst>
               <a:ext uri="{FF2B5EF4-FFF2-40B4-BE49-F238E27FC236}">
-                <a16:creationId xmlns:a16="http://schemas.microsoft.com/office/drawing/2014/main" id="{5F812510-248E-7A7A-29A8-67885467F02D}"/>
+                <a16:creationId xmlns:a16="http://schemas.microsoft.com/office/drawing/2014/main" id="{531BF0BF-23AD-7698-6D29-16DF34E535DB}"/>
               </a:ext>
             </a:extLst>
           </p:cNvPr>
@@ -765,7 +765,7 @@
           <p:cNvPr id="6" name="スライド番号プレースホルダー 5">
             <a:extLst>
               <a:ext uri="{FF2B5EF4-FFF2-40B4-BE49-F238E27FC236}">
-                <a16:creationId xmlns:a16="http://schemas.microsoft.com/office/drawing/2014/main" id="{4CE19823-C08C-87A5-3AD8-7C22B9599813}"/>
+                <a16:creationId xmlns:a16="http://schemas.microsoft.com/office/drawing/2014/main" id="{BE129F2F-F516-13D7-9C97-C325F7DC6BAA}"/>
               </a:ext>
             </a:extLst>
           </p:cNvPr>
@@ -781,7 +781,7 @@
           <a:bodyPr/>
           <a:lstStyle/>
           <a:p>
-            <a:fld id="{6264FF53-8EA5-4F5B-BDBD-16DA39B13EAE}" type="slidenum">
+            <a:fld id="{F0682D63-0293-4361-B49C-680D0399EA59}" type="slidenum">
               <a:rPr kumimoji="1" lang="ja-JP" altLang="en-US" smtClean="0"/>
               <a:t>‹#›</a:t>
             </a:fld>
@@ -792,7 +792,7 @@
     </p:spTree>
     <p:extLst>
       <p:ext uri="{BB962C8B-B14F-4D97-AF65-F5344CB8AC3E}">
-        <p14:creationId xmlns:p14="http://schemas.microsoft.com/office/powerpoint/2010/main" val="4038054488"/>
+        <p14:creationId xmlns:p14="http://schemas.microsoft.com/office/powerpoint/2010/main" val="1928685816"/>
       </p:ext>
     </p:extLst>
   </p:cSld>
@@ -824,7 +824,7 @@
           <p:cNvPr id="2" name="タイトル 1">
             <a:extLst>
               <a:ext uri="{FF2B5EF4-FFF2-40B4-BE49-F238E27FC236}">
-                <a16:creationId xmlns:a16="http://schemas.microsoft.com/office/drawing/2014/main" id="{AC1BC985-D2A8-9024-5EEB-8320B7156FBF}"/>
+                <a16:creationId xmlns:a16="http://schemas.microsoft.com/office/drawing/2014/main" id="{8A183C0F-FFBC-AA9A-FC6E-41670E76F7FF}"/>
               </a:ext>
             </a:extLst>
           </p:cNvPr>
@@ -852,7 +852,7 @@
           <p:cNvPr id="3" name="コンテンツ プレースホルダー 2">
             <a:extLst>
               <a:ext uri="{FF2B5EF4-FFF2-40B4-BE49-F238E27FC236}">
-                <a16:creationId xmlns:a16="http://schemas.microsoft.com/office/drawing/2014/main" id="{8E3A808E-5BED-3E34-F410-DD0D441D6BD3}"/>
+                <a16:creationId xmlns:a16="http://schemas.microsoft.com/office/drawing/2014/main" id="{1225E2B2-E233-9496-C7C0-DCDCEDA0E5CE}"/>
               </a:ext>
             </a:extLst>
           </p:cNvPr>
@@ -941,7 +941,7 @@
           <p:cNvPr id="4" name="日付プレースホルダー 3">
             <a:extLst>
               <a:ext uri="{FF2B5EF4-FFF2-40B4-BE49-F238E27FC236}">
-                <a16:creationId xmlns:a16="http://schemas.microsoft.com/office/drawing/2014/main" id="{CA076335-EBA8-4230-BEC0-CA3612C531D5}"/>
+                <a16:creationId xmlns:a16="http://schemas.microsoft.com/office/drawing/2014/main" id="{5D1F452D-E1FB-CF0B-E8BA-20BAF2BE5753}"/>
               </a:ext>
             </a:extLst>
           </p:cNvPr>
@@ -957,7 +957,7 @@
           <a:bodyPr/>
           <a:lstStyle/>
           <a:p>
-            <a:fld id="{0A8A0AA6-8141-4780-979E-310A883CB877}" type="datetimeFigureOut">
+            <a:fld id="{D8CE3B7E-E1F2-4F78-8443-C780D5803C9B}" type="datetimeFigureOut">
               <a:rPr kumimoji="1" lang="ja-JP" altLang="en-US" smtClean="0"/>
               <a:t>2026/7/30</a:t>
             </a:fld>
@@ -970,7 +970,7 @@
           <p:cNvPr id="5" name="フッター プレースホルダー 4">
             <a:extLst>
               <a:ext uri="{FF2B5EF4-FFF2-40B4-BE49-F238E27FC236}">
-                <a16:creationId xmlns:a16="http://schemas.microsoft.com/office/drawing/2014/main" id="{69431C51-18FF-DBCE-9CA0-27D35E3839BA}"/>
+                <a16:creationId xmlns:a16="http://schemas.microsoft.com/office/drawing/2014/main" id="{96777FB1-0A00-0E97-1ED9-0695299EA733}"/>
               </a:ext>
             </a:extLst>
           </p:cNvPr>
@@ -995,7 +995,7 @@
           <p:cNvPr id="6" name="スライド番号プレースホルダー 5">
             <a:extLst>
               <a:ext uri="{FF2B5EF4-FFF2-40B4-BE49-F238E27FC236}">
-                <a16:creationId xmlns:a16="http://schemas.microsoft.com/office/drawing/2014/main" id="{B94CC501-C75B-4895-6F77-C1432BBD6EFD}"/>
+                <a16:creationId xmlns:a16="http://schemas.microsoft.com/office/drawing/2014/main" id="{B1348E21-3A62-B114-F2E6-76DE38B50695}"/>
               </a:ext>
             </a:extLst>
           </p:cNvPr>
@@ -1011,7 +1011,7 @@
           <a:bodyPr/>
           <a:lstStyle/>
           <a:p>
-            <a:fld id="{6264FF53-8EA5-4F5B-BDBD-16DA39B13EAE}" type="slidenum">
+            <a:fld id="{F0682D63-0293-4361-B49C-680D0399EA59}" type="slidenum">
               <a:rPr kumimoji="1" lang="ja-JP" altLang="en-US" smtClean="0"/>
               <a:t>‹#›</a:t>
             </a:fld>
@@ -1022,7 +1022,7 @@
     </p:spTree>
     <p:extLst>
       <p:ext uri="{BB962C8B-B14F-4D97-AF65-F5344CB8AC3E}">
-        <p14:creationId xmlns:p14="http://schemas.microsoft.com/office/powerpoint/2010/main" val="1273238409"/>
+        <p14:creationId xmlns:p14="http://schemas.microsoft.com/office/powerpoint/2010/main" val="3002355740"/>
       </p:ext>
     </p:extLst>
   </p:cSld>
@@ -1054,7 +1054,7 @@
           <p:cNvPr id="2" name="タイトル 1">
             <a:extLst>
               <a:ext uri="{FF2B5EF4-FFF2-40B4-BE49-F238E27FC236}">
-                <a16:creationId xmlns:a16="http://schemas.microsoft.com/office/drawing/2014/main" id="{FF99B641-3BE6-3270-06AE-2989727B72BE}"/>
+                <a16:creationId xmlns:a16="http://schemas.microsoft.com/office/drawing/2014/main" id="{4B392ECE-8431-D39D-14C5-E64719EEAB87}"/>
               </a:ext>
             </a:extLst>
           </p:cNvPr>
@@ -1091,7 +1091,7 @@
           <p:cNvPr id="3" name="テキスト プレースホルダー 2">
             <a:extLst>
               <a:ext uri="{FF2B5EF4-FFF2-40B4-BE49-F238E27FC236}">
-                <a16:creationId xmlns:a16="http://schemas.microsoft.com/office/drawing/2014/main" id="{B28A1605-D5CE-452E-69FF-0B36A85997B8}"/>
+                <a16:creationId xmlns:a16="http://schemas.microsoft.com/office/drawing/2014/main" id="{69565A0D-10D5-8A2B-6EB8-3AB18CC3455D}"/>
               </a:ext>
             </a:extLst>
           </p:cNvPr>
@@ -1216,7 +1216,7 @@
           <p:cNvPr id="4" name="日付プレースホルダー 3">
             <a:extLst>
               <a:ext uri="{FF2B5EF4-FFF2-40B4-BE49-F238E27FC236}">
-                <a16:creationId xmlns:a16="http://schemas.microsoft.com/office/drawing/2014/main" id="{0F45BE2C-058B-D5E8-6DCE-562D5411A9C4}"/>
+                <a16:creationId xmlns:a16="http://schemas.microsoft.com/office/drawing/2014/main" id="{DB66B036-B95C-2EA8-6950-21579DF4AF8F}"/>
               </a:ext>
             </a:extLst>
           </p:cNvPr>
@@ -1232,7 +1232,7 @@
           <a:bodyPr/>
           <a:lstStyle/>
           <a:p>
-            <a:fld id="{0A8A0AA6-8141-4780-979E-310A883CB877}" type="datetimeFigureOut">
+            <a:fld id="{D8CE3B7E-E1F2-4F78-8443-C780D5803C9B}" type="datetimeFigureOut">
               <a:rPr kumimoji="1" lang="ja-JP" altLang="en-US" smtClean="0"/>
               <a:t>2026/7/30</a:t>
             </a:fld>
@@ -1245,7 +1245,7 @@
           <p:cNvPr id="5" name="フッター プレースホルダー 4">
             <a:extLst>
               <a:ext uri="{FF2B5EF4-FFF2-40B4-BE49-F238E27FC236}">
-                <a16:creationId xmlns:a16="http://schemas.microsoft.com/office/drawing/2014/main" id="{DDD535A1-5AAA-2C08-84FE-3DBC238C3FB0}"/>
+                <a16:creationId xmlns:a16="http://schemas.microsoft.com/office/drawing/2014/main" id="{4361E484-E41F-271B-AF4C-AF93D1519A61}"/>
               </a:ext>
             </a:extLst>
           </p:cNvPr>
@@ -1270,7 +1270,7 @@
           <p:cNvPr id="6" name="スライド番号プレースホルダー 5">
             <a:extLst>
               <a:ext uri="{FF2B5EF4-FFF2-40B4-BE49-F238E27FC236}">
-                <a16:creationId xmlns:a16="http://schemas.microsoft.com/office/drawing/2014/main" id="{BB22D6BD-00C6-A256-E96E-E5C1A956BA61}"/>
+                <a16:creationId xmlns:a16="http://schemas.microsoft.com/office/drawing/2014/main" id="{A4F5F269-1E47-B659-2EAD-661A896D7717}"/>
               </a:ext>
             </a:extLst>
           </p:cNvPr>
@@ -1286,7 +1286,7 @@
           <a:bodyPr/>
           <a:lstStyle/>
           <a:p>
-            <a:fld id="{6264FF53-8EA5-4F5B-BDBD-16DA39B13EAE}" type="slidenum">
+            <a:fld id="{F0682D63-0293-4361-B49C-680D0399EA59}" type="slidenum">
               <a:rPr kumimoji="1" lang="ja-JP" altLang="en-US" smtClean="0"/>
               <a:t>‹#›</a:t>
             </a:fld>
@@ -1297,7 +1297,7 @@
     </p:spTree>
     <p:extLst>
       <p:ext uri="{BB962C8B-B14F-4D97-AF65-F5344CB8AC3E}">
-        <p14:creationId xmlns:p14="http://schemas.microsoft.com/office/powerpoint/2010/main" val="421116160"/>
+        <p14:creationId xmlns:p14="http://schemas.microsoft.com/office/powerpoint/2010/main" val="3266593165"/>
       </p:ext>
     </p:extLst>
   </p:cSld>
@@ -1329,7 +1329,7 @@
           <p:cNvPr id="2" name="タイトル 1">
             <a:extLst>
               <a:ext uri="{FF2B5EF4-FFF2-40B4-BE49-F238E27FC236}">
-                <a16:creationId xmlns:a16="http://schemas.microsoft.com/office/drawing/2014/main" id="{4D99F89A-3E48-31E5-A6B2-CAB0C7C0FC3B}"/>
+                <a16:creationId xmlns:a16="http://schemas.microsoft.com/office/drawing/2014/main" id="{0836FE64-5B30-51A7-372F-9CA24056C01C}"/>
               </a:ext>
             </a:extLst>
           </p:cNvPr>
@@ -1357,7 +1357,7 @@
           <p:cNvPr id="3" name="コンテンツ プレースホルダー 2">
             <a:extLst>
               <a:ext uri="{FF2B5EF4-FFF2-40B4-BE49-F238E27FC236}">
-                <a16:creationId xmlns:a16="http://schemas.microsoft.com/office/drawing/2014/main" id="{0A44EBDD-FBD1-AF43-730D-DF625F37A331}"/>
+                <a16:creationId xmlns:a16="http://schemas.microsoft.com/office/drawing/2014/main" id="{85BB3AF7-EDFC-F687-5AC1-A820850A925A}"/>
               </a:ext>
             </a:extLst>
           </p:cNvPr>
@@ -1451,7 +1451,7 @@
           <p:cNvPr id="4" name="コンテンツ プレースホルダー 3">
             <a:extLst>
               <a:ext uri="{FF2B5EF4-FFF2-40B4-BE49-F238E27FC236}">
-                <a16:creationId xmlns:a16="http://schemas.microsoft.com/office/drawing/2014/main" id="{2AAD7CF2-BE22-A016-1429-111B2115C4C2}"/>
+                <a16:creationId xmlns:a16="http://schemas.microsoft.com/office/drawing/2014/main" id="{7D500ECB-6193-EE1B-BDCC-BBE50D6CD95C}"/>
               </a:ext>
             </a:extLst>
           </p:cNvPr>
@@ -1545,7 +1545,7 @@
           <p:cNvPr id="5" name="日付プレースホルダー 4">
             <a:extLst>
               <a:ext uri="{FF2B5EF4-FFF2-40B4-BE49-F238E27FC236}">
-                <a16:creationId xmlns:a16="http://schemas.microsoft.com/office/drawing/2014/main" id="{508969D7-1D31-5DC8-3266-CE2E129DC3AC}"/>
+                <a16:creationId xmlns:a16="http://schemas.microsoft.com/office/drawing/2014/main" id="{270AA92A-8261-8CA2-1502-3B02C6AED0CB}"/>
               </a:ext>
             </a:extLst>
           </p:cNvPr>
@@ -1561,7 +1561,7 @@
           <a:bodyPr/>
           <a:lstStyle/>
           <a:p>
-            <a:fld id="{0A8A0AA6-8141-4780-979E-310A883CB877}" type="datetimeFigureOut">
+            <a:fld id="{D8CE3B7E-E1F2-4F78-8443-C780D5803C9B}" type="datetimeFigureOut">
               <a:rPr kumimoji="1" lang="ja-JP" altLang="en-US" smtClean="0"/>
               <a:t>2026/7/30</a:t>
             </a:fld>
@@ -1574,7 +1574,7 @@
           <p:cNvPr id="6" name="フッター プレースホルダー 5">
             <a:extLst>
               <a:ext uri="{FF2B5EF4-FFF2-40B4-BE49-F238E27FC236}">
-                <a16:creationId xmlns:a16="http://schemas.microsoft.com/office/drawing/2014/main" id="{07E93262-7FAD-5F83-A914-AD8219F0E6D6}"/>
+                <a16:creationId xmlns:a16="http://schemas.microsoft.com/office/drawing/2014/main" id="{872B84D1-F378-2275-39E6-C313B75AE443}"/>
               </a:ext>
             </a:extLst>
           </p:cNvPr>
@@ -1599,7 +1599,7 @@
           <p:cNvPr id="7" name="スライド番号プレースホルダー 6">
             <a:extLst>
               <a:ext uri="{FF2B5EF4-FFF2-40B4-BE49-F238E27FC236}">
-                <a16:creationId xmlns:a16="http://schemas.microsoft.com/office/drawing/2014/main" id="{3C76AE8A-5B14-337D-4322-547A5A091A17}"/>
+                <a16:creationId xmlns:a16="http://schemas.microsoft.com/office/drawing/2014/main" id="{5972231B-C58A-785F-B2E7-BC37A32DB4BB}"/>
               </a:ext>
             </a:extLst>
           </p:cNvPr>
@@ -1615,7 +1615,7 @@
           <a:bodyPr/>
           <a:lstStyle/>
           <a:p>
-            <a:fld id="{6264FF53-8EA5-4F5B-BDBD-16DA39B13EAE}" type="slidenum">
+            <a:fld id="{F0682D63-0293-4361-B49C-680D0399EA59}" type="slidenum">
               <a:rPr kumimoji="1" lang="ja-JP" altLang="en-US" smtClean="0"/>
               <a:t>‹#›</a:t>
             </a:fld>
@@ -1626,7 +1626,7 @@
     </p:spTree>
     <p:extLst>
       <p:ext uri="{BB962C8B-B14F-4D97-AF65-F5344CB8AC3E}">
-        <p14:creationId xmlns:p14="http://schemas.microsoft.com/office/powerpoint/2010/main" val="3423229629"/>
+        <p14:creationId xmlns:p14="http://schemas.microsoft.com/office/powerpoint/2010/main" val="2313418429"/>
       </p:ext>
     </p:extLst>
   </p:cSld>
@@ -1658,7 +1658,7 @@
           <p:cNvPr id="2" name="タイトル 1">
             <a:extLst>
               <a:ext uri="{FF2B5EF4-FFF2-40B4-BE49-F238E27FC236}">
-                <a16:creationId xmlns:a16="http://schemas.microsoft.com/office/drawing/2014/main" id="{EE254F90-EC35-5DE8-A4F0-0795501DAF9A}"/>
+                <a16:creationId xmlns:a16="http://schemas.microsoft.com/office/drawing/2014/main" id="{33F24043-3CD6-D5D9-B671-CD7D87D54386}"/>
               </a:ext>
             </a:extLst>
           </p:cNvPr>
@@ -1691,7 +1691,7 @@
           <p:cNvPr id="3" name="テキスト プレースホルダー 2">
             <a:extLst>
               <a:ext uri="{FF2B5EF4-FFF2-40B4-BE49-F238E27FC236}">
-                <a16:creationId xmlns:a16="http://schemas.microsoft.com/office/drawing/2014/main" id="{CE6DD0CC-9E4E-E617-0C19-24DD67245937}"/>
+                <a16:creationId xmlns:a16="http://schemas.microsoft.com/office/drawing/2014/main" id="{CE9E1654-7DF5-5252-24A0-C016B450A17A}"/>
               </a:ext>
             </a:extLst>
           </p:cNvPr>
@@ -1762,7 +1762,7 @@
           <p:cNvPr id="4" name="コンテンツ プレースホルダー 3">
             <a:extLst>
               <a:ext uri="{FF2B5EF4-FFF2-40B4-BE49-F238E27FC236}">
-                <a16:creationId xmlns:a16="http://schemas.microsoft.com/office/drawing/2014/main" id="{F9A3E41A-DC33-272C-5B46-E6BF44976CB5}"/>
+                <a16:creationId xmlns:a16="http://schemas.microsoft.com/office/drawing/2014/main" id="{15F0BE9D-514B-49BD-27B7-CFF001297ED1}"/>
               </a:ext>
             </a:extLst>
           </p:cNvPr>
@@ -1856,7 +1856,7 @@
           <p:cNvPr id="5" name="テキスト プレースホルダー 4">
             <a:extLst>
               <a:ext uri="{FF2B5EF4-FFF2-40B4-BE49-F238E27FC236}">
-                <a16:creationId xmlns:a16="http://schemas.microsoft.com/office/drawing/2014/main" id="{FD71E54F-B96E-ED54-760C-D042788D7C57}"/>
+                <a16:creationId xmlns:a16="http://schemas.microsoft.com/office/drawing/2014/main" id="{F735A94F-F35D-9FFC-42F6-5989B4FA421A}"/>
               </a:ext>
             </a:extLst>
           </p:cNvPr>
@@ -1927,7 +1927,7 @@
           <p:cNvPr id="6" name="コンテンツ プレースホルダー 5">
             <a:extLst>
               <a:ext uri="{FF2B5EF4-FFF2-40B4-BE49-F238E27FC236}">
-                <a16:creationId xmlns:a16="http://schemas.microsoft.com/office/drawing/2014/main" id="{BFC89253-1814-429C-AABE-51E7651D1D28}"/>
+                <a16:creationId xmlns:a16="http://schemas.microsoft.com/office/drawing/2014/main" id="{A8CB6A4F-8C1F-79E7-FAD0-E8F53A940B6D}"/>
               </a:ext>
             </a:extLst>
           </p:cNvPr>
@@ -2021,7 +2021,7 @@
           <p:cNvPr id="7" name="日付プレースホルダー 6">
             <a:extLst>
               <a:ext uri="{FF2B5EF4-FFF2-40B4-BE49-F238E27FC236}">
-                <a16:creationId xmlns:a16="http://schemas.microsoft.com/office/drawing/2014/main" id="{AEA3E8B4-E3CC-92CB-9B9D-189E02BF59AF}"/>
+                <a16:creationId xmlns:a16="http://schemas.microsoft.com/office/drawing/2014/main" id="{164E2D46-B9FE-72E7-4647-213B8A39CCEE}"/>
               </a:ext>
             </a:extLst>
           </p:cNvPr>
@@ -2037,7 +2037,7 @@
           <a:bodyPr/>
           <a:lstStyle/>
           <a:p>
-            <a:fld id="{0A8A0AA6-8141-4780-979E-310A883CB877}" type="datetimeFigureOut">
+            <a:fld id="{D8CE3B7E-E1F2-4F78-8443-C780D5803C9B}" type="datetimeFigureOut">
               <a:rPr kumimoji="1" lang="ja-JP" altLang="en-US" smtClean="0"/>
               <a:t>2026/7/30</a:t>
             </a:fld>
@@ -2050,7 +2050,7 @@
           <p:cNvPr id="8" name="フッター プレースホルダー 7">
             <a:extLst>
               <a:ext uri="{FF2B5EF4-FFF2-40B4-BE49-F238E27FC236}">
-                <a16:creationId xmlns:a16="http://schemas.microsoft.com/office/drawing/2014/main" id="{9D6ABE9C-E049-3232-964A-563D30143277}"/>
+                <a16:creationId xmlns:a16="http://schemas.microsoft.com/office/drawing/2014/main" id="{483C7DF3-10B3-5E69-25ED-449B8679BF52}"/>
               </a:ext>
             </a:extLst>
           </p:cNvPr>
@@ -2075,7 +2075,7 @@
           <p:cNvPr id="9" name="スライド番号プレースホルダー 8">
             <a:extLst>
               <a:ext uri="{FF2B5EF4-FFF2-40B4-BE49-F238E27FC236}">
-                <a16:creationId xmlns:a16="http://schemas.microsoft.com/office/drawing/2014/main" id="{A83A2974-BC80-5B1C-7591-B7BE61A83808}"/>
+                <a16:creationId xmlns:a16="http://schemas.microsoft.com/office/drawing/2014/main" id="{2A3FC54A-CCF3-2D41-3C89-0A78CE4DF6FF}"/>
               </a:ext>
             </a:extLst>
           </p:cNvPr>
@@ -2091,7 +2091,7 @@
           <a:bodyPr/>
           <a:lstStyle/>
           <a:p>
-            <a:fld id="{6264FF53-8EA5-4F5B-BDBD-16DA39B13EAE}" type="slidenum">
+            <a:fld id="{F0682D63-0293-4361-B49C-680D0399EA59}" type="slidenum">
               <a:rPr kumimoji="1" lang="ja-JP" altLang="en-US" smtClean="0"/>
               <a:t>‹#›</a:t>
             </a:fld>
@@ -2102,7 +2102,7 @@
     </p:spTree>
     <p:extLst>
       <p:ext uri="{BB962C8B-B14F-4D97-AF65-F5344CB8AC3E}">
-        <p14:creationId xmlns:p14="http://schemas.microsoft.com/office/powerpoint/2010/main" val="3175629811"/>
+        <p14:creationId xmlns:p14="http://schemas.microsoft.com/office/powerpoint/2010/main" val="4131668252"/>
       </p:ext>
     </p:extLst>
   </p:cSld>
@@ -2134,7 +2134,7 @@
           <p:cNvPr id="2" name="タイトル 1">
             <a:extLst>
               <a:ext uri="{FF2B5EF4-FFF2-40B4-BE49-F238E27FC236}">
-                <a16:creationId xmlns:a16="http://schemas.microsoft.com/office/drawing/2014/main" id="{69C596EF-3F5B-71F5-37CE-FA0AEF4C6A09}"/>
+                <a16:creationId xmlns:a16="http://schemas.microsoft.com/office/drawing/2014/main" id="{4F664E3C-4FBF-D2EC-C5D4-9521ADE80C8F}"/>
               </a:ext>
             </a:extLst>
           </p:cNvPr>
@@ -2162,7 +2162,7 @@
           <p:cNvPr id="3" name="日付プレースホルダー 2">
             <a:extLst>
               <a:ext uri="{FF2B5EF4-FFF2-40B4-BE49-F238E27FC236}">
-                <a16:creationId xmlns:a16="http://schemas.microsoft.com/office/drawing/2014/main" id="{BEDDE9C4-6DD6-E9C8-431B-32BABFD10FB5}"/>
+                <a16:creationId xmlns:a16="http://schemas.microsoft.com/office/drawing/2014/main" id="{0164DDDF-C71F-D717-552B-2FBD753F7E75}"/>
               </a:ext>
             </a:extLst>
           </p:cNvPr>
@@ -2178,7 +2178,7 @@
           <a:bodyPr/>
           <a:lstStyle/>
           <a:p>
-            <a:fld id="{0A8A0AA6-8141-4780-979E-310A883CB877}" type="datetimeFigureOut">
+            <a:fld id="{D8CE3B7E-E1F2-4F78-8443-C780D5803C9B}" type="datetimeFigureOut">
               <a:rPr kumimoji="1" lang="ja-JP" altLang="en-US" smtClean="0"/>
               <a:t>2026/7/30</a:t>
             </a:fld>
@@ -2191,7 +2191,7 @@
           <p:cNvPr id="4" name="フッター プレースホルダー 3">
             <a:extLst>
               <a:ext uri="{FF2B5EF4-FFF2-40B4-BE49-F238E27FC236}">
-                <a16:creationId xmlns:a16="http://schemas.microsoft.com/office/drawing/2014/main" id="{5C72F124-37FF-7335-7C25-C3464CE672CF}"/>
+                <a16:creationId xmlns:a16="http://schemas.microsoft.com/office/drawing/2014/main" id="{8921D51F-2AAA-5939-36A7-7048FF3A1572}"/>
               </a:ext>
             </a:extLst>
           </p:cNvPr>
@@ -2216,7 +2216,7 @@
           <p:cNvPr id="5" name="スライド番号プレースホルダー 4">
             <a:extLst>
               <a:ext uri="{FF2B5EF4-FFF2-40B4-BE49-F238E27FC236}">
-                <a16:creationId xmlns:a16="http://schemas.microsoft.com/office/drawing/2014/main" id="{A370935E-FB67-BDF9-DD60-6B95235C2650}"/>
+                <a16:creationId xmlns:a16="http://schemas.microsoft.com/office/drawing/2014/main" id="{A3A45E98-2E1A-3B4B-A66B-09B0D16E8C32}"/>
               </a:ext>
             </a:extLst>
           </p:cNvPr>
@@ -2232,7 +2232,7 @@
           <a:bodyPr/>
           <a:lstStyle/>
           <a:p>
-            <a:fld id="{6264FF53-8EA5-4F5B-BDBD-16DA39B13EAE}" type="slidenum">
+            <a:fld id="{F0682D63-0293-4361-B49C-680D0399EA59}" type="slidenum">
               <a:rPr kumimoji="1" lang="ja-JP" altLang="en-US" smtClean="0"/>
               <a:t>‹#›</a:t>
             </a:fld>
@@ -2243,7 +2243,7 @@
     </p:spTree>
     <p:extLst>
       <p:ext uri="{BB962C8B-B14F-4D97-AF65-F5344CB8AC3E}">
-        <p14:creationId xmlns:p14="http://schemas.microsoft.com/office/powerpoint/2010/main" val="675426370"/>
+        <p14:creationId xmlns:p14="http://schemas.microsoft.com/office/powerpoint/2010/main" val="1022624117"/>
       </p:ext>
     </p:extLst>
   </p:cSld>
@@ -2275,7 +2275,7 @@
           <p:cNvPr id="2" name="日付プレースホルダー 1">
             <a:extLst>
               <a:ext uri="{FF2B5EF4-FFF2-40B4-BE49-F238E27FC236}">
-                <a16:creationId xmlns:a16="http://schemas.microsoft.com/office/drawing/2014/main" id="{64280315-3EB0-DC9F-E0C4-1E270EA00E67}"/>
+                <a16:creationId xmlns:a16="http://schemas.microsoft.com/office/drawing/2014/main" id="{073E1F0D-5AE3-6545-F450-64BFF355DF7A}"/>
               </a:ext>
             </a:extLst>
           </p:cNvPr>
@@ -2291,7 +2291,7 @@
           <a:bodyPr/>
           <a:lstStyle/>
           <a:p>
-            <a:fld id="{0A8A0AA6-8141-4780-979E-310A883CB877}" type="datetimeFigureOut">
+            <a:fld id="{D8CE3B7E-E1F2-4F78-8443-C780D5803C9B}" type="datetimeFigureOut">
               <a:rPr kumimoji="1" lang="ja-JP" altLang="en-US" smtClean="0"/>
               <a:t>2026/7/30</a:t>
             </a:fld>
@@ -2304,7 +2304,7 @@
           <p:cNvPr id="3" name="フッター プレースホルダー 2">
             <a:extLst>
               <a:ext uri="{FF2B5EF4-FFF2-40B4-BE49-F238E27FC236}">
-                <a16:creationId xmlns:a16="http://schemas.microsoft.com/office/drawing/2014/main" id="{7C66E897-F2FC-BD99-0696-408B1843EEC2}"/>
+                <a16:creationId xmlns:a16="http://schemas.microsoft.com/office/drawing/2014/main" id="{93224D99-F066-1162-9471-289DEBA85F82}"/>
               </a:ext>
             </a:extLst>
           </p:cNvPr>
@@ -2329,7 +2329,7 @@
           <p:cNvPr id="4" name="スライド番号プレースホルダー 3">
             <a:extLst>
               <a:ext uri="{FF2B5EF4-FFF2-40B4-BE49-F238E27FC236}">
-                <a16:creationId xmlns:a16="http://schemas.microsoft.com/office/drawing/2014/main" id="{600B99CF-603E-641E-5136-A94F36D5C418}"/>
+                <a16:creationId xmlns:a16="http://schemas.microsoft.com/office/drawing/2014/main" id="{523645F4-3C72-C9D2-25EC-92EEB25E0087}"/>
               </a:ext>
             </a:extLst>
           </p:cNvPr>
@@ -2345,7 +2345,7 @@
           <a:bodyPr/>
           <a:lstStyle/>
           <a:p>
-            <a:fld id="{6264FF53-8EA5-4F5B-BDBD-16DA39B13EAE}" type="slidenum">
+            <a:fld id="{F0682D63-0293-4361-B49C-680D0399EA59}" type="slidenum">
               <a:rPr kumimoji="1" lang="ja-JP" altLang="en-US" smtClean="0"/>
               <a:t>‹#›</a:t>
             </a:fld>
@@ -2356,7 +2356,7 @@
     </p:spTree>
     <p:extLst>
       <p:ext uri="{BB962C8B-B14F-4D97-AF65-F5344CB8AC3E}">
-        <p14:creationId xmlns:p14="http://schemas.microsoft.com/office/powerpoint/2010/main" val="2922456588"/>
+        <p14:creationId xmlns:p14="http://schemas.microsoft.com/office/powerpoint/2010/main" val="1612994236"/>
       </p:ext>
     </p:extLst>
   </p:cSld>
@@ -2388,7 +2388,7 @@
           <p:cNvPr id="2" name="タイトル 1">
             <a:extLst>
               <a:ext uri="{FF2B5EF4-FFF2-40B4-BE49-F238E27FC236}">
-                <a16:creationId xmlns:a16="http://schemas.microsoft.com/office/drawing/2014/main" id="{8A9C572D-01EA-D192-4516-2D715FA99EDD}"/>
+                <a16:creationId xmlns:a16="http://schemas.microsoft.com/office/drawing/2014/main" id="{08457801-1DEF-4BB8-E8A2-8F8CE9A2D812}"/>
               </a:ext>
             </a:extLst>
           </p:cNvPr>
@@ -2425,7 +2425,7 @@
           <p:cNvPr id="3" name="コンテンツ プレースホルダー 2">
             <a:extLst>
               <a:ext uri="{FF2B5EF4-FFF2-40B4-BE49-F238E27FC236}">
-                <a16:creationId xmlns:a16="http://schemas.microsoft.com/office/drawing/2014/main" id="{F2DC894C-797B-8812-1A35-FDC1A864A044}"/>
+                <a16:creationId xmlns:a16="http://schemas.microsoft.com/office/drawing/2014/main" id="{D6B58A4C-6E83-9275-23C5-EB7FEB0F54F5}"/>
               </a:ext>
             </a:extLst>
           </p:cNvPr>
@@ -2547,7 +2547,7 @@
           <p:cNvPr id="4" name="テキスト プレースホルダー 3">
             <a:extLst>
               <a:ext uri="{FF2B5EF4-FFF2-40B4-BE49-F238E27FC236}">
-                <a16:creationId xmlns:a16="http://schemas.microsoft.com/office/drawing/2014/main" id="{547124D8-C9D9-E02A-960B-43B941124899}"/>
+                <a16:creationId xmlns:a16="http://schemas.microsoft.com/office/drawing/2014/main" id="{EAC65B69-B1CB-E8B1-1549-674C37B37C7A}"/>
               </a:ext>
             </a:extLst>
           </p:cNvPr>
@@ -2618,7 +2618,7 @@
           <p:cNvPr id="5" name="日付プレースホルダー 4">
             <a:extLst>
               <a:ext uri="{FF2B5EF4-FFF2-40B4-BE49-F238E27FC236}">
-                <a16:creationId xmlns:a16="http://schemas.microsoft.com/office/drawing/2014/main" id="{FAE6820F-07F4-7AAF-5E05-276022C20277}"/>
+                <a16:creationId xmlns:a16="http://schemas.microsoft.com/office/drawing/2014/main" id="{17BD71D0-D8F5-67CB-5222-BA9212A972AE}"/>
               </a:ext>
             </a:extLst>
           </p:cNvPr>
@@ -2634,7 +2634,7 @@
           <a:bodyPr/>
           <a:lstStyle/>
           <a:p>
-            <a:fld id="{0A8A0AA6-8141-4780-979E-310A883CB877}" type="datetimeFigureOut">
+            <a:fld id="{D8CE3B7E-E1F2-4F78-8443-C780D5803C9B}" type="datetimeFigureOut">
               <a:rPr kumimoji="1" lang="ja-JP" altLang="en-US" smtClean="0"/>
               <a:t>2026/7/30</a:t>
             </a:fld>
@@ -2647,7 +2647,7 @@
           <p:cNvPr id="6" name="フッター プレースホルダー 5">
             <a:extLst>
               <a:ext uri="{FF2B5EF4-FFF2-40B4-BE49-F238E27FC236}">
-                <a16:creationId xmlns:a16="http://schemas.microsoft.com/office/drawing/2014/main" id="{D79F8BC4-9F40-B02A-3503-A132B72D289F}"/>
+                <a16:creationId xmlns:a16="http://schemas.microsoft.com/office/drawing/2014/main" id="{F3190A45-BB08-9BDA-62DC-EE1C11437519}"/>
               </a:ext>
             </a:extLst>
           </p:cNvPr>
@@ -2672,7 +2672,7 @@
           <p:cNvPr id="7" name="スライド番号プレースホルダー 6">
             <a:extLst>
               <a:ext uri="{FF2B5EF4-FFF2-40B4-BE49-F238E27FC236}">
-                <a16:creationId xmlns:a16="http://schemas.microsoft.com/office/drawing/2014/main" id="{5A845FA5-5273-DB10-D48A-FDF48B7A29BF}"/>
+                <a16:creationId xmlns:a16="http://schemas.microsoft.com/office/drawing/2014/main" id="{88F29B0D-ECAC-18F7-8A88-FA507EF0C0D6}"/>
               </a:ext>
             </a:extLst>
           </p:cNvPr>
@@ -2688,7 +2688,7 @@
           <a:bodyPr/>
           <a:lstStyle/>
           <a:p>
-            <a:fld id="{6264FF53-8EA5-4F5B-BDBD-16DA39B13EAE}" type="slidenum">
+            <a:fld id="{F0682D63-0293-4361-B49C-680D0399EA59}" type="slidenum">
               <a:rPr kumimoji="1" lang="ja-JP" altLang="en-US" smtClean="0"/>
               <a:t>‹#›</a:t>
             </a:fld>
@@ -2699,7 +2699,7 @@
     </p:spTree>
     <p:extLst>
       <p:ext uri="{BB962C8B-B14F-4D97-AF65-F5344CB8AC3E}">
-        <p14:creationId xmlns:p14="http://schemas.microsoft.com/office/powerpoint/2010/main" val="935095507"/>
+        <p14:creationId xmlns:p14="http://schemas.microsoft.com/office/powerpoint/2010/main" val="1512675236"/>
       </p:ext>
     </p:extLst>
   </p:cSld>
@@ -2731,7 +2731,7 @@
           <p:cNvPr id="2" name="タイトル 1">
             <a:extLst>
               <a:ext uri="{FF2B5EF4-FFF2-40B4-BE49-F238E27FC236}">
-                <a16:creationId xmlns:a16="http://schemas.microsoft.com/office/drawing/2014/main" id="{EB0B3C3A-FD73-5794-B44E-07E675BDAC78}"/>
+                <a16:creationId xmlns:a16="http://schemas.microsoft.com/office/drawing/2014/main" id="{E0D328C2-9BD9-58A3-7DC6-4265B2EA66BF}"/>
               </a:ext>
             </a:extLst>
           </p:cNvPr>
@@ -2768,7 +2768,7 @@
           <p:cNvPr id="3" name="図プレースホルダー 2">
             <a:extLst>
               <a:ext uri="{FF2B5EF4-FFF2-40B4-BE49-F238E27FC236}">
-                <a16:creationId xmlns:a16="http://schemas.microsoft.com/office/drawing/2014/main" id="{D898C2C2-562F-5A0A-4382-6A232A5AD707}"/>
+                <a16:creationId xmlns:a16="http://schemas.microsoft.com/office/drawing/2014/main" id="{3458F76F-9E7B-79D4-FEE1-AAE8F4E45795}"/>
               </a:ext>
             </a:extLst>
           </p:cNvPr>
@@ -2835,7 +2835,7 @@
           <p:cNvPr id="4" name="テキスト プレースホルダー 3">
             <a:extLst>
               <a:ext uri="{FF2B5EF4-FFF2-40B4-BE49-F238E27FC236}">
-                <a16:creationId xmlns:a16="http://schemas.microsoft.com/office/drawing/2014/main" id="{4B943345-ECD7-6891-0A28-265B9973CDFF}"/>
+                <a16:creationId xmlns:a16="http://schemas.microsoft.com/office/drawing/2014/main" id="{BF40F990-F09F-9BE8-373D-71777F52E541}"/>
               </a:ext>
             </a:extLst>
           </p:cNvPr>
@@ -2906,7 +2906,7 @@
           <p:cNvPr id="5" name="日付プレースホルダー 4">
             <a:extLst>
               <a:ext uri="{FF2B5EF4-FFF2-40B4-BE49-F238E27FC236}">
-                <a16:creationId xmlns:a16="http://schemas.microsoft.com/office/drawing/2014/main" id="{9D14A025-257E-A722-6392-2DDB713CFDE5}"/>
+                <a16:creationId xmlns:a16="http://schemas.microsoft.com/office/drawing/2014/main" id="{C30DE065-7120-30BD-BF0C-724954A18DDF}"/>
               </a:ext>
             </a:extLst>
           </p:cNvPr>
@@ -2922,7 +2922,7 @@
           <a:bodyPr/>
           <a:lstStyle/>
           <a:p>
-            <a:fld id="{0A8A0AA6-8141-4780-979E-310A883CB877}" type="datetimeFigureOut">
+            <a:fld id="{D8CE3B7E-E1F2-4F78-8443-C780D5803C9B}" type="datetimeFigureOut">
               <a:rPr kumimoji="1" lang="ja-JP" altLang="en-US" smtClean="0"/>
               <a:t>2026/7/30</a:t>
             </a:fld>
@@ -2935,7 +2935,7 @@
           <p:cNvPr id="6" name="フッター プレースホルダー 5">
             <a:extLst>
               <a:ext uri="{FF2B5EF4-FFF2-40B4-BE49-F238E27FC236}">
-                <a16:creationId xmlns:a16="http://schemas.microsoft.com/office/drawing/2014/main" id="{0D61CF4F-36FB-5769-52C2-B31CAA7B028E}"/>
+                <a16:creationId xmlns:a16="http://schemas.microsoft.com/office/drawing/2014/main" id="{8F340277-30C2-864A-CF9A-7AC1F50612F3}"/>
               </a:ext>
             </a:extLst>
           </p:cNvPr>
@@ -2960,7 +2960,7 @@
           <p:cNvPr id="7" name="スライド番号プレースホルダー 6">
             <a:extLst>
               <a:ext uri="{FF2B5EF4-FFF2-40B4-BE49-F238E27FC236}">
-                <a16:creationId xmlns:a16="http://schemas.microsoft.com/office/drawing/2014/main" id="{E71B3CB6-01DA-3196-DC66-14FC829F7A1C}"/>
+                <a16:creationId xmlns:a16="http://schemas.microsoft.com/office/drawing/2014/main" id="{2A797B37-35AB-9B86-3A1B-333C6D78FC36}"/>
               </a:ext>
             </a:extLst>
           </p:cNvPr>
@@ -2976,7 +2976,7 @@
           <a:bodyPr/>
           <a:lstStyle/>
           <a:p>
-            <a:fld id="{6264FF53-8EA5-4F5B-BDBD-16DA39B13EAE}" type="slidenum">
+            <a:fld id="{F0682D63-0293-4361-B49C-680D0399EA59}" type="slidenum">
               <a:rPr kumimoji="1" lang="ja-JP" altLang="en-US" smtClean="0"/>
               <a:t>‹#›</a:t>
             </a:fld>
@@ -2987,7 +2987,7 @@
     </p:spTree>
     <p:extLst>
       <p:ext uri="{BB962C8B-B14F-4D97-AF65-F5344CB8AC3E}">
-        <p14:creationId xmlns:p14="http://schemas.microsoft.com/office/powerpoint/2010/main" val="1064192368"/>
+        <p14:creationId xmlns:p14="http://schemas.microsoft.com/office/powerpoint/2010/main" val="2081521476"/>
       </p:ext>
     </p:extLst>
   </p:cSld>
@@ -3024,7 +3024,7 @@
           <p:cNvPr id="2" name="タイトル プレースホルダー 1">
             <a:extLst>
               <a:ext uri="{FF2B5EF4-FFF2-40B4-BE49-F238E27FC236}">
-                <a16:creationId xmlns:a16="http://schemas.microsoft.com/office/drawing/2014/main" id="{8948A256-DCD6-FB58-CB51-D786D365934C}"/>
+                <a16:creationId xmlns:a16="http://schemas.microsoft.com/office/drawing/2014/main" id="{D892ED81-6D4C-1E32-8BDA-5F76DF76EEB3}"/>
               </a:ext>
             </a:extLst>
           </p:cNvPr>
@@ -3062,7 +3062,7 @@
           <p:cNvPr id="3" name="テキスト プレースホルダー 2">
             <a:extLst>
               <a:ext uri="{FF2B5EF4-FFF2-40B4-BE49-F238E27FC236}">
-                <a16:creationId xmlns:a16="http://schemas.microsoft.com/office/drawing/2014/main" id="{4D96D99E-B7E0-190F-C0FE-82F2059B9227}"/>
+                <a16:creationId xmlns:a16="http://schemas.microsoft.com/office/drawing/2014/main" id="{FFCADFC8-44B2-AFD0-4942-A12B8D20583D}"/>
               </a:ext>
             </a:extLst>
           </p:cNvPr>
@@ -3161,7 +3161,7 @@
           <p:cNvPr id="4" name="日付プレースホルダー 3">
             <a:extLst>
               <a:ext uri="{FF2B5EF4-FFF2-40B4-BE49-F238E27FC236}">
-                <a16:creationId xmlns:a16="http://schemas.microsoft.com/office/drawing/2014/main" id="{5F604403-ABBC-02DB-A02D-907E8C510E6F}"/>
+                <a16:creationId xmlns:a16="http://schemas.microsoft.com/office/drawing/2014/main" id="{8BA78314-DCE7-B1FF-3A48-D1084AF4BD85}"/>
               </a:ext>
             </a:extLst>
           </p:cNvPr>
@@ -3195,7 +3195,7 @@
             </a:lvl1pPr>
           </a:lstStyle>
           <a:p>
-            <a:fld id="{0A8A0AA6-8141-4780-979E-310A883CB877}" type="datetimeFigureOut">
+            <a:fld id="{D8CE3B7E-E1F2-4F78-8443-C780D5803C9B}" type="datetimeFigureOut">
               <a:rPr kumimoji="1" lang="ja-JP" altLang="en-US" smtClean="0"/>
               <a:t>2026/7/30</a:t>
             </a:fld>
@@ -3208,7 +3208,7 @@
           <p:cNvPr id="5" name="フッター プレースホルダー 4">
             <a:extLst>
               <a:ext uri="{FF2B5EF4-FFF2-40B4-BE49-F238E27FC236}">
-                <a16:creationId xmlns:a16="http://schemas.microsoft.com/office/drawing/2014/main" id="{43070DA8-F885-B0F7-BA48-3823E9F510FA}"/>
+                <a16:creationId xmlns:a16="http://schemas.microsoft.com/office/drawing/2014/main" id="{71B8D2E6-EA0B-6336-E12E-60EF1FB254D0}"/>
               </a:ext>
             </a:extLst>
           </p:cNvPr>
@@ -3251,7 +3251,7 @@
           <p:cNvPr id="6" name="スライド番号プレースホルダー 5">
             <a:extLst>
               <a:ext uri="{FF2B5EF4-FFF2-40B4-BE49-F238E27FC236}">
-                <a16:creationId xmlns:a16="http://schemas.microsoft.com/office/drawing/2014/main" id="{8EABC54A-B1C2-84C8-E14C-EA0BB44F8552}"/>
+                <a16:creationId xmlns:a16="http://schemas.microsoft.com/office/drawing/2014/main" id="{D5686C87-C120-BA40-F85A-83EDAB209FD6}"/>
               </a:ext>
             </a:extLst>
           </p:cNvPr>
@@ -3285,7 +3285,7 @@
             </a:lvl1pPr>
           </a:lstStyle>
           <a:p>
-            <a:fld id="{6264FF53-8EA5-4F5B-BDBD-16DA39B13EAE}" type="slidenum">
+            <a:fld id="{F0682D63-0293-4361-B49C-680D0399EA59}" type="slidenum">
               <a:rPr kumimoji="1" lang="ja-JP" altLang="en-US" smtClean="0"/>
               <a:t>‹#›</a:t>
             </a:fld>
@@ -3296,7 +3296,7 @@
     </p:spTree>
     <p:extLst>
       <p:ext uri="{BB962C8B-B14F-4D97-AF65-F5344CB8AC3E}">
-        <p14:creationId xmlns:p14="http://schemas.microsoft.com/office/powerpoint/2010/main" val="2763830302"/>
+        <p14:creationId xmlns:p14="http://schemas.microsoft.com/office/powerpoint/2010/main" val="757900079"/>
       </p:ext>
     </p:extLst>
   </p:cSld>
@@ -3619,7 +3619,7 @@
           <p:cNvPr id="2" name="テキスト ボックス 1">
             <a:extLst>
               <a:ext uri="{FF2B5EF4-FFF2-40B4-BE49-F238E27FC236}">
-                <a16:creationId xmlns:a16="http://schemas.microsoft.com/office/drawing/2014/main" id="{EC85D43B-DDA7-0776-F46E-FAAFE1344A6A}"/>
+                <a16:creationId xmlns:a16="http://schemas.microsoft.com/office/drawing/2014/main" id="{DCF0FFAA-5A79-9778-79D9-D7A469C9927D}"/>
               </a:ext>
             </a:extLst>
           </p:cNvPr>
@@ -3665,7 +3665,7 @@
           <p:cNvPr id="3" name="テキスト ボックス 2">
             <a:extLst>
               <a:ext uri="{FF2B5EF4-FFF2-40B4-BE49-F238E27FC236}">
-                <a16:creationId xmlns:a16="http://schemas.microsoft.com/office/drawing/2014/main" id="{580E2AEA-22EE-E92B-C03A-052D23AEC26F}"/>
+                <a16:creationId xmlns:a16="http://schemas.microsoft.com/office/drawing/2014/main" id="{D7B28552-AF35-086E-14E2-F364C14D31D8}"/>
               </a:ext>
             </a:extLst>
           </p:cNvPr>
@@ -3714,7 +3714,7 @@
           <p:cNvPr id="4" name="テキスト ボックス 3">
             <a:extLst>
               <a:ext uri="{FF2B5EF4-FFF2-40B4-BE49-F238E27FC236}">
-                <a16:creationId xmlns:a16="http://schemas.microsoft.com/office/drawing/2014/main" id="{B244F670-BCEA-1EED-3D64-CDD24A0AE6FA}"/>
+                <a16:creationId xmlns:a16="http://schemas.microsoft.com/office/drawing/2014/main" id="{72892744-6222-7545-7926-0914DFB10725}"/>
               </a:ext>
             </a:extLst>
           </p:cNvPr>
@@ -3754,7 +3754,7 @@
           <p:cNvPr id="5" name="テキスト ボックス 4">
             <a:extLst>
               <a:ext uri="{FF2B5EF4-FFF2-40B4-BE49-F238E27FC236}">
-                <a16:creationId xmlns:a16="http://schemas.microsoft.com/office/drawing/2014/main" id="{E019DCAD-CBD0-3707-B59F-2969A857EBB6}"/>
+                <a16:creationId xmlns:a16="http://schemas.microsoft.com/office/drawing/2014/main" id="{5A69FC58-4F99-BDC8-65BD-EA4B2BC22846}"/>
               </a:ext>
             </a:extLst>
           </p:cNvPr>
@@ -3801,7 +3801,7 @@
             <a:hlinkClick r:id="" action="ppaction://media"/>
             <a:extLst>
               <a:ext uri="{FF2B5EF4-FFF2-40B4-BE49-F238E27FC236}">
-                <a16:creationId xmlns:a16="http://schemas.microsoft.com/office/drawing/2014/main" id="{2145B8B1-53E0-91E8-E06B-96445B527AC1}"/>
+                <a16:creationId xmlns:a16="http://schemas.microsoft.com/office/drawing/2014/main" id="{802E5378-EC9E-8024-E466-3A7902A28386}"/>
               </a:ext>
             </a:extLst>
           </p:cNvPr>
@@ -3836,7 +3836,7 @@
     </p:spTree>
     <p:extLst>
       <p:ext uri="{BB962C8B-B14F-4D97-AF65-F5344CB8AC3E}">
-        <p14:creationId xmlns:p14="http://schemas.microsoft.com/office/powerpoint/2010/main" val="2969881203"/>
+        <p14:creationId xmlns:p14="http://schemas.microsoft.com/office/powerpoint/2010/main" val="3734060164"/>
       </p:ext>
     </p:extLst>
   </p:cSld>
@@ -3960,7 +3960,7 @@
           <p:cNvPr id="2" name="テキスト ボックス 1">
             <a:extLst>
               <a:ext uri="{FF2B5EF4-FFF2-40B4-BE49-F238E27FC236}">
-                <a16:creationId xmlns:a16="http://schemas.microsoft.com/office/drawing/2014/main" id="{0341643E-65A7-0542-434B-62610834C764}"/>
+                <a16:creationId xmlns:a16="http://schemas.microsoft.com/office/drawing/2014/main" id="{3567A9CE-59BA-D1D7-B0BB-9E230DCF42F9}"/>
               </a:ext>
             </a:extLst>
           </p:cNvPr>
@@ -4006,7 +4006,7 @@
           <p:cNvPr id="3" name="テキスト ボックス 2">
             <a:extLst>
               <a:ext uri="{FF2B5EF4-FFF2-40B4-BE49-F238E27FC236}">
-                <a16:creationId xmlns:a16="http://schemas.microsoft.com/office/drawing/2014/main" id="{E163488E-11AD-FB1E-0377-BD5341DE241A}"/>
+                <a16:creationId xmlns:a16="http://schemas.microsoft.com/office/drawing/2014/main" id="{E4AF86E7-9017-CD4E-E013-BA3830D740A5}"/>
               </a:ext>
             </a:extLst>
           </p:cNvPr>
@@ -4046,7 +4046,7 @@
           <p:cNvPr id="4" name="テキスト ボックス 3">
             <a:extLst>
               <a:ext uri="{FF2B5EF4-FFF2-40B4-BE49-F238E27FC236}">
-                <a16:creationId xmlns:a16="http://schemas.microsoft.com/office/drawing/2014/main" id="{AAFBB476-FD13-34C3-0190-8CA24E9C3574}"/>
+                <a16:creationId xmlns:a16="http://schemas.microsoft.com/office/drawing/2014/main" id="{742F8240-97AA-6158-58C1-0649FC491C41}"/>
               </a:ext>
             </a:extLst>
           </p:cNvPr>
@@ -4110,7 +4110,7 @@
           <p:cNvPr id="5" name="テキスト ボックス 4">
             <a:extLst>
               <a:ext uri="{FF2B5EF4-FFF2-40B4-BE49-F238E27FC236}">
-                <a16:creationId xmlns:a16="http://schemas.microsoft.com/office/drawing/2014/main" id="{795A6BE4-89FD-C122-C620-B98AC007A955}"/>
+                <a16:creationId xmlns:a16="http://schemas.microsoft.com/office/drawing/2014/main" id="{9B25B42F-17C7-3E8A-1489-AC7DD47D6295}"/>
               </a:ext>
             </a:extLst>
           </p:cNvPr>
@@ -4157,7 +4157,7 @@
             <a:hlinkClick r:id="" action="ppaction://media"/>
             <a:extLst>
               <a:ext uri="{FF2B5EF4-FFF2-40B4-BE49-F238E27FC236}">
-                <a16:creationId xmlns:a16="http://schemas.microsoft.com/office/drawing/2014/main" id="{4B06402E-3832-9BC2-CF48-09BCB5817B1E}"/>
+                <a16:creationId xmlns:a16="http://schemas.microsoft.com/office/drawing/2014/main" id="{1EF3D2F2-C725-37B1-216A-4AD565889C70}"/>
               </a:ext>
             </a:extLst>
           </p:cNvPr>
@@ -4192,7 +4192,7 @@
     </p:spTree>
     <p:extLst>
       <p:ext uri="{BB962C8B-B14F-4D97-AF65-F5344CB8AC3E}">
-        <p14:creationId xmlns:p14="http://schemas.microsoft.com/office/powerpoint/2010/main" val="3058831276"/>
+        <p14:creationId xmlns:p14="http://schemas.microsoft.com/office/powerpoint/2010/main" val="2900548025"/>
       </p:ext>
     </p:extLst>
   </p:cSld>
@@ -4316,7 +4316,7 @@
           <p:cNvPr id="2" name="テキスト ボックス 1">
             <a:extLst>
               <a:ext uri="{FF2B5EF4-FFF2-40B4-BE49-F238E27FC236}">
-                <a16:creationId xmlns:a16="http://schemas.microsoft.com/office/drawing/2014/main" id="{E4597E63-0652-33B6-EE25-76738F01676B}"/>
+                <a16:creationId xmlns:a16="http://schemas.microsoft.com/office/drawing/2014/main" id="{D38E313F-CEE4-A19C-63B0-D78ED0A6A6F8}"/>
               </a:ext>
             </a:extLst>
           </p:cNvPr>
@@ -4362,7 +4362,7 @@
           <p:cNvPr id="3" name="テキスト ボックス 2">
             <a:extLst>
               <a:ext uri="{FF2B5EF4-FFF2-40B4-BE49-F238E27FC236}">
-                <a16:creationId xmlns:a16="http://schemas.microsoft.com/office/drawing/2014/main" id="{CE7251C2-2F12-9A5E-503E-E68CE944492C}"/>
+                <a16:creationId xmlns:a16="http://schemas.microsoft.com/office/drawing/2014/main" id="{0BA7FDE8-5B9C-5D34-3F9D-D51E354B2B1F}"/>
               </a:ext>
             </a:extLst>
           </p:cNvPr>
@@ -4402,7 +4402,7 @@
           <p:cNvPr id="4" name="テキスト ボックス 3">
             <a:extLst>
               <a:ext uri="{FF2B5EF4-FFF2-40B4-BE49-F238E27FC236}">
-                <a16:creationId xmlns:a16="http://schemas.microsoft.com/office/drawing/2014/main" id="{4B1270AE-3C0E-B466-8026-65029733056D}"/>
+                <a16:creationId xmlns:a16="http://schemas.microsoft.com/office/drawing/2014/main" id="{A6F701C4-D5DB-5B41-9CD4-C8A470316D7E}"/>
               </a:ext>
             </a:extLst>
           </p:cNvPr>
@@ -4497,7 +4497,7 @@
           <p:cNvPr id="5" name="テキスト ボックス 4">
             <a:extLst>
               <a:ext uri="{FF2B5EF4-FFF2-40B4-BE49-F238E27FC236}">
-                <a16:creationId xmlns:a16="http://schemas.microsoft.com/office/drawing/2014/main" id="{D20B8CFF-15E4-6A41-53C6-F7BE05A34ED0}"/>
+                <a16:creationId xmlns:a16="http://schemas.microsoft.com/office/drawing/2014/main" id="{D893E0BD-F59D-BD6E-087B-5901EE0C4257}"/>
               </a:ext>
             </a:extLst>
           </p:cNvPr>
@@ -4544,7 +4544,7 @@
             <a:hlinkClick r:id="" action="ppaction://media"/>
             <a:extLst>
               <a:ext uri="{FF2B5EF4-FFF2-40B4-BE49-F238E27FC236}">
-                <a16:creationId xmlns:a16="http://schemas.microsoft.com/office/drawing/2014/main" id="{99F57C6F-4E37-9596-4796-F210E3269E55}"/>
+                <a16:creationId xmlns:a16="http://schemas.microsoft.com/office/drawing/2014/main" id="{620381F2-39BA-615A-7539-4845A196406F}"/>
               </a:ext>
             </a:extLst>
           </p:cNvPr>
@@ -4579,7 +4579,7 @@
     </p:spTree>
     <p:extLst>
       <p:ext uri="{BB962C8B-B14F-4D97-AF65-F5344CB8AC3E}">
-        <p14:creationId xmlns:p14="http://schemas.microsoft.com/office/powerpoint/2010/main" val="3326548019"/>
+        <p14:creationId xmlns:p14="http://schemas.microsoft.com/office/powerpoint/2010/main" val="1426515915"/>
       </p:ext>
     </p:extLst>
   </p:cSld>
@@ -4703,7 +4703,7 @@
           <p:cNvPr id="2" name="テキスト ボックス 1">
             <a:extLst>
               <a:ext uri="{FF2B5EF4-FFF2-40B4-BE49-F238E27FC236}">
-                <a16:creationId xmlns:a16="http://schemas.microsoft.com/office/drawing/2014/main" id="{EA719E97-721C-D51C-4932-314C3A192C7B}"/>
+                <a16:creationId xmlns:a16="http://schemas.microsoft.com/office/drawing/2014/main" id="{12A88F83-D30F-663D-8C4D-595A0AEEFEC1}"/>
               </a:ext>
             </a:extLst>
           </p:cNvPr>
@@ -4749,7 +4749,7 @@
           <p:cNvPr id="3" name="テキスト ボックス 2">
             <a:extLst>
               <a:ext uri="{FF2B5EF4-FFF2-40B4-BE49-F238E27FC236}">
-                <a16:creationId xmlns:a16="http://schemas.microsoft.com/office/drawing/2014/main" id="{49F58AE6-3E80-7213-A290-1D965629AE39}"/>
+                <a16:creationId xmlns:a16="http://schemas.microsoft.com/office/drawing/2014/main" id="{A5BCB189-641F-79CC-C45F-C07908919A79}"/>
               </a:ext>
             </a:extLst>
           </p:cNvPr>
@@ -4789,7 +4789,7 @@
           <p:cNvPr id="4" name="テキスト ボックス 3">
             <a:extLst>
               <a:ext uri="{FF2B5EF4-FFF2-40B4-BE49-F238E27FC236}">
-                <a16:creationId xmlns:a16="http://schemas.microsoft.com/office/drawing/2014/main" id="{B65CD545-1546-6EF6-DCA2-0277D2C671FE}"/>
+                <a16:creationId xmlns:a16="http://schemas.microsoft.com/office/drawing/2014/main" id="{F1A55D45-6626-3EB8-0D7C-F0CA2E9DC270}"/>
               </a:ext>
             </a:extLst>
           </p:cNvPr>
@@ -4899,7 +4899,7 @@
           <p:cNvPr id="5" name="テキスト ボックス 4">
             <a:extLst>
               <a:ext uri="{FF2B5EF4-FFF2-40B4-BE49-F238E27FC236}">
-                <a16:creationId xmlns:a16="http://schemas.microsoft.com/office/drawing/2014/main" id="{76047604-925B-C144-AB59-11BA807315F7}"/>
+                <a16:creationId xmlns:a16="http://schemas.microsoft.com/office/drawing/2014/main" id="{763F7650-4EA8-94A8-5601-531F25FD05F8}"/>
               </a:ext>
             </a:extLst>
           </p:cNvPr>
@@ -4946,7 +4946,7 @@
             <a:hlinkClick r:id="" action="ppaction://media"/>
             <a:extLst>
               <a:ext uri="{FF2B5EF4-FFF2-40B4-BE49-F238E27FC236}">
-                <a16:creationId xmlns:a16="http://schemas.microsoft.com/office/drawing/2014/main" id="{B8AEAB59-89B3-8B07-B33D-382C9B3FB79F}"/>
+                <a16:creationId xmlns:a16="http://schemas.microsoft.com/office/drawing/2014/main" id="{0525E8E2-1606-E94F-6A7D-75D126930115}"/>
               </a:ext>
             </a:extLst>
           </p:cNvPr>
@@ -4981,7 +4981,7 @@
     </p:spTree>
     <p:extLst>
       <p:ext uri="{BB962C8B-B14F-4D97-AF65-F5344CB8AC3E}">
-        <p14:creationId xmlns:p14="http://schemas.microsoft.com/office/powerpoint/2010/main" val="2487825804"/>
+        <p14:creationId xmlns:p14="http://schemas.microsoft.com/office/powerpoint/2010/main" val="2396132254"/>
       </p:ext>
     </p:extLst>
   </p:cSld>
@@ -5105,7 +5105,7 @@
           <p:cNvPr id="2" name="テキスト ボックス 1">
             <a:extLst>
               <a:ext uri="{FF2B5EF4-FFF2-40B4-BE49-F238E27FC236}">
-                <a16:creationId xmlns:a16="http://schemas.microsoft.com/office/drawing/2014/main" id="{E3B33A32-B4A7-9D28-CF48-23739108C73E}"/>
+                <a16:creationId xmlns:a16="http://schemas.microsoft.com/office/drawing/2014/main" id="{41EF850B-06DF-319C-6B66-67B9C2FC2CDB}"/>
               </a:ext>
             </a:extLst>
           </p:cNvPr>
@@ -5151,7 +5151,7 @@
           <p:cNvPr id="3" name="テキスト ボックス 2">
             <a:extLst>
               <a:ext uri="{FF2B5EF4-FFF2-40B4-BE49-F238E27FC236}">
-                <a16:creationId xmlns:a16="http://schemas.microsoft.com/office/drawing/2014/main" id="{AC91CB17-E158-986B-5589-32833783B3B0}"/>
+                <a16:creationId xmlns:a16="http://schemas.microsoft.com/office/drawing/2014/main" id="{0EB32918-6E31-9AFC-DDF5-EDDE6C6B97F5}"/>
               </a:ext>
             </a:extLst>
           </p:cNvPr>
@@ -5191,7 +5191,7 @@
           <p:cNvPr id="4" name="テキスト ボックス 3">
             <a:extLst>
               <a:ext uri="{FF2B5EF4-FFF2-40B4-BE49-F238E27FC236}">
-                <a16:creationId xmlns:a16="http://schemas.microsoft.com/office/drawing/2014/main" id="{2E11F261-3001-6595-5451-3AD0E01AF5D7}"/>
+                <a16:creationId xmlns:a16="http://schemas.microsoft.com/office/drawing/2014/main" id="{8E0D0946-10C0-9766-098F-8117C7A0A053}"/>
               </a:ext>
             </a:extLst>
           </p:cNvPr>
@@ -5215,20 +5215,14 @@
           <a:lstStyle/>
           <a:p>
             <a:r>
-              <a:rPr kumimoji="1" lang="en-US" altLang="ja-JP" sz="2000">
+              <a:rPr kumimoji="1" lang="ja-JP" altLang="en-US" sz="2000">
                 <a:solidFill>
                   <a:srgbClr val="333333"/>
                 </a:solidFill>
                 <a:latin typeface="Arial" panose="020B0604020202020204" pitchFamily="34" charset="0"/>
               </a:rPr>
-              <a:t>Set confirmed custom domain</a:t>
-            </a:r>
-            <a:endParaRPr kumimoji="1" lang="ja-JP" altLang="en-US" sz="2000">
-              <a:solidFill>
-                <a:srgbClr val="333333"/>
-              </a:solidFill>
-              <a:latin typeface="Arial" panose="020B0604020202020204" pitchFamily="34" charset="0"/>
-            </a:endParaRPr>
+              <a:t>直近のコミットでは、実装の見直しと継続的な改善が行われました。</a:t>
+            </a:r>
           </a:p>
         </p:txBody>
       </p:sp>
@@ -5237,7 +5231,7 @@
           <p:cNvPr id="5" name="テキスト ボックス 4">
             <a:extLst>
               <a:ext uri="{FF2B5EF4-FFF2-40B4-BE49-F238E27FC236}">
-                <a16:creationId xmlns:a16="http://schemas.microsoft.com/office/drawing/2014/main" id="{535A5AD0-72F9-2165-99E7-1073F1D1D42D}"/>
+                <a16:creationId xmlns:a16="http://schemas.microsoft.com/office/drawing/2014/main" id="{F8F1A85A-F790-8B0C-127B-2A8C357F02A4}"/>
               </a:ext>
             </a:extLst>
           </p:cNvPr>
@@ -5284,7 +5278,7 @@
             <a:hlinkClick r:id="" action="ppaction://media"/>
             <a:extLst>
               <a:ext uri="{FF2B5EF4-FFF2-40B4-BE49-F238E27FC236}">
-                <a16:creationId xmlns:a16="http://schemas.microsoft.com/office/drawing/2014/main" id="{295A7ED5-A5AF-D923-8011-05FEAA7EA98A}"/>
+                <a16:creationId xmlns:a16="http://schemas.microsoft.com/office/drawing/2014/main" id="{022ED0FA-1295-E046-654E-8C2581EB4999}"/>
               </a:ext>
             </a:extLst>
           </p:cNvPr>
@@ -5319,7 +5313,7 @@
     </p:spTree>
     <p:extLst>
       <p:ext uri="{BB962C8B-B14F-4D97-AF65-F5344CB8AC3E}">
-        <p14:creationId xmlns:p14="http://schemas.microsoft.com/office/powerpoint/2010/main" val="2171510120"/>
+        <p14:creationId xmlns:p14="http://schemas.microsoft.com/office/powerpoint/2010/main" val="3512457894"/>
       </p:ext>
     </p:extLst>
   </p:cSld>
@@ -5362,7 +5356,7 @@
                                   <p:childTnLst>
                                     <p:cmd type="call" cmd="playFrom(0.0)">
                                       <p:cBhvr>
-                                        <p:cTn id="6" dur="6451" fill="hold"/>
+                                        <p:cTn id="6" dur="6076" fill="hold"/>
                                         <p:tgtEl>
                                           <p:spTgt spid="6"/>
                                         </p:tgtEl>
@@ -5443,7 +5437,7 @@
           <p:cNvPr id="2" name="テキスト ボックス 1">
             <a:extLst>
               <a:ext uri="{FF2B5EF4-FFF2-40B4-BE49-F238E27FC236}">
-                <a16:creationId xmlns:a16="http://schemas.microsoft.com/office/drawing/2014/main" id="{64249D06-7683-2EE8-F7E2-8D402B67E019}"/>
+                <a16:creationId xmlns:a16="http://schemas.microsoft.com/office/drawing/2014/main" id="{243A9B28-F076-14D9-0A95-129636A08987}"/>
               </a:ext>
             </a:extLst>
           </p:cNvPr>
@@ -5489,7 +5483,7 @@
           <p:cNvPr id="3" name="テキスト ボックス 2">
             <a:extLst>
               <a:ext uri="{FF2B5EF4-FFF2-40B4-BE49-F238E27FC236}">
-                <a16:creationId xmlns:a16="http://schemas.microsoft.com/office/drawing/2014/main" id="{470A5429-80BB-BE76-7882-0686A1FF899E}"/>
+                <a16:creationId xmlns:a16="http://schemas.microsoft.com/office/drawing/2014/main" id="{1958F2F1-0FC4-926B-51A9-C619D396DF8B}"/>
               </a:ext>
             </a:extLst>
           </p:cNvPr>
@@ -5529,7 +5523,7 @@
           <p:cNvPr id="4" name="テキスト ボックス 3">
             <a:extLst>
               <a:ext uri="{FF2B5EF4-FFF2-40B4-BE49-F238E27FC236}">
-                <a16:creationId xmlns:a16="http://schemas.microsoft.com/office/drawing/2014/main" id="{44D96E77-4834-B4D2-7966-570FAC6B519A}"/>
+                <a16:creationId xmlns:a16="http://schemas.microsoft.com/office/drawing/2014/main" id="{027E8A3A-C201-BB11-72B4-7D1A76E9AC49}"/>
               </a:ext>
             </a:extLst>
           </p:cNvPr>
@@ -5594,7 +5588,7 @@
           <p:cNvPr id="5" name="テキスト ボックス 4">
             <a:extLst>
               <a:ext uri="{FF2B5EF4-FFF2-40B4-BE49-F238E27FC236}">
-                <a16:creationId xmlns:a16="http://schemas.microsoft.com/office/drawing/2014/main" id="{612F68B3-225C-CABC-CF9E-559542C54AF0}"/>
+                <a16:creationId xmlns:a16="http://schemas.microsoft.com/office/drawing/2014/main" id="{2B7B32B5-16B4-FCC7-963D-DE1277F21627}"/>
               </a:ext>
             </a:extLst>
           </p:cNvPr>
@@ -5641,7 +5635,7 @@
             <a:hlinkClick r:id="" action="ppaction://media"/>
             <a:extLst>
               <a:ext uri="{FF2B5EF4-FFF2-40B4-BE49-F238E27FC236}">
-                <a16:creationId xmlns:a16="http://schemas.microsoft.com/office/drawing/2014/main" id="{50A51377-D9B3-79F7-AFD2-01EBF6874FEE}"/>
+                <a16:creationId xmlns:a16="http://schemas.microsoft.com/office/drawing/2014/main" id="{C4D85C31-CB8D-6D0B-1833-88E1FEC78529}"/>
               </a:ext>
             </a:extLst>
           </p:cNvPr>
@@ -5676,7 +5670,7 @@
     </p:spTree>
     <p:extLst>
       <p:ext uri="{BB962C8B-B14F-4D97-AF65-F5344CB8AC3E}">
-        <p14:creationId xmlns:p14="http://schemas.microsoft.com/office/powerpoint/2010/main" val="650743285"/>
+        <p14:creationId xmlns:p14="http://schemas.microsoft.com/office/powerpoint/2010/main" val="77465821"/>
       </p:ext>
     </p:extLst>
   </p:cSld>
